--- a/exports/quarto/pptx/03_FedRAMP20x_Crosswalk.pptx
+++ b/exports/quarto/pptx/03_FedRAMP20x_Crosswalk.pptx
@@ -3190,7 +3190,7 @@
             </a:pPr>
             <a:r>
               <a:rPr/>
-              <a:t>April 2, 2026</a:t>
+              <a:t>April 3, 2026</a:t>
             </a:r>
           </a:p>
         </p:txBody>
